--- a/lecons/LSA/Climatology/LSA_CLIM_L19_Meaning_of_Climate_and_K_ppen_s_Classification.pptx
+++ b/lecons/LSA/Climatology/LSA_CLIM_L19_Meaning_of_Climate_and_K_ppen_s_Classification.pptx
@@ -2934,7 +2934,7 @@
           <a:p>
             <a:r>
               <a:rPr lang="en-US" dirty="0"/>
-              <a:t>Let us copy Meaning, Elements and Characteristics. Climate can be understood as follows. Write each point on a new line, with the key term first. When you finish, we go to the next slide.</a:t>
+              <a:t>Let us copy Meaning, Elements and Characteristics. Climate can be understood as follows. On this slide we have Climate. Write each point on a new line, with the key term first, and explain it in your own words when we revise. When you finish, we go to the next slide.</a:t>
             </a:r>
             <a:endParaRPr lang="en-US" dirty="0"/>
           </a:p>
@@ -3022,7 +3022,7 @@
           <a:p>
             <a:r>
               <a:rPr lang="en-US" dirty="0"/>
-              <a:t>We continue with the same part. Write each point on a new line, with the key term first. When you finish, we go to the next slide.</a:t>
+              <a:t>We continue with Meaning, Elements and Characteristics. On this slide we have Elements of climate. Write each point on a new line, with the key term first, and explain it in your own words when we revise. When you finish, we go to the next slide.</a:t>
             </a:r>
             <a:endParaRPr lang="en-US" dirty="0"/>
           </a:p>
@@ -3110,7 +3110,7 @@
           <a:p>
             <a:r>
               <a:rPr lang="en-US" dirty="0"/>
-              <a:t>We continue with the same part. Write each point on a new line, with the key term first.</a:t>
+              <a:t>We continue with Meaning, Elements and Characteristics. On this slide we have Characteristics. Write each point on a new line, with the key term first, and explain it in your own words when we revise.</a:t>
             </a:r>
             <a:endParaRPr lang="en-US" dirty="0"/>
           </a:p>
@@ -3198,7 +3198,7 @@
           <a:p>
             <a:r>
               <a:rPr lang="en-US" dirty="0"/>
-              <a:t>Let us copy Classification of Climate. Climates are classified in two ways. Write each point on a new line, with the key term first. When you finish, we go to the next slide.</a:t>
+              <a:t>Let us copy Classification of Climate. Climates are classified in two ways. On this slide we have Genetic classification. Write each point on a new line, with the key term first, and explain it in your own words when we revise. When you finish, we go to the next slide.</a:t>
             </a:r>
             <a:endParaRPr lang="en-US" dirty="0"/>
           </a:p>
@@ -3286,7 +3286,7 @@
           <a:p>
             <a:r>
               <a:rPr lang="en-US" dirty="0"/>
-              <a:t>We continue with the same part. Write each point on a new line, with the key term first.</a:t>
+              <a:t>We continue with Classification of Climate. On this slide we have Empirical classification. Write each point on a new line, with the key term first, and explain it in your own words when we revise.</a:t>
             </a:r>
             <a:endParaRPr lang="en-US" dirty="0"/>
           </a:p>
@@ -3374,7 +3374,7 @@
           <a:p>
             <a:r>
               <a:rPr lang="en-US" dirty="0"/>
-              <a:t>Let us copy Köppen's Classification. Köppen uses letters for the main climate groups. Write each point on a new line, with the key term first. When you finish, we go to the next slide.</a:t>
+              <a:t>Let us copy Köppen's Classification. Köppen uses letters for the main climate groups. On this slide we have A – Tropical humid climates. Write each point on a new line, with the key term first, and explain it in your own words when we revise. When you finish, we go to the next slide.</a:t>
             </a:r>
             <a:endParaRPr lang="en-US" dirty="0"/>
           </a:p>
@@ -3550,7 +3550,7 @@
           <a:p>
             <a:r>
               <a:rPr lang="en-US" dirty="0"/>
-              <a:t>We continue with the same part. Write each point on a new line, with the key term first. When you finish, we go to the next slide.</a:t>
+              <a:t>We continue with Köppen's Classification. On this slide we have B – Dry climates and C – Warm temperate climates. Write each point on a new line, with the key term first, and explain it in your own words when we revise. When you finish, we go to the next slide.</a:t>
             </a:r>
             <a:endParaRPr lang="en-US" dirty="0"/>
           </a:p>
@@ -3638,7 +3638,7 @@
           <a:p>
             <a:r>
               <a:rPr lang="en-US" dirty="0"/>
-              <a:t>We continue with the same part. Write each point on a new line, with the key term first.</a:t>
+              <a:t>We continue with Köppen's Classification. On this slide we have D and E – Cold and polar climates. Write each point on a new line, with the key term first, and explain it in your own words when we revise.</a:t>
             </a:r>
             <a:endParaRPr lang="en-US" dirty="0"/>
           </a:p>
@@ -3814,7 +3814,7 @@
           <a:p>
             <a:r>
               <a:rPr lang="en-US" dirty="0"/>
-              <a:t>Let us copy General Factors (Controls) of Climate. The main factors of climate are. Write each point on a new line, with the key term first. When you finish, we go to the next slide.</a:t>
+              <a:t>Let us copy General Factors (Controls) of Climate. The main factors of climate are. On this slide we have Insolation and latitude. Write each point on a new line, with the key term first, and explain it in your own words when we revise. When you finish, we go to the next slide.</a:t>
             </a:r>
             <a:endParaRPr lang="en-US" dirty="0"/>
           </a:p>
@@ -3902,7 +3902,7 @@
           <a:p>
             <a:r>
               <a:rPr lang="en-US" dirty="0"/>
-              <a:t>We continue with the same part. Write each point on a new line, with the key term first.</a:t>
+              <a:t>We continue with General Factors (Controls) of Climate. On this slide we have Pressure, air masses and winds and Relief, ocean currents and man. Write each point on a new line, with the key term first, and explain it in your own words when we revise.</a:t>
             </a:r>
             <a:endParaRPr lang="en-US" dirty="0"/>
           </a:p>
@@ -5222,7 +5222,7 @@
           <a:p>
             <a:r>
               <a:rPr lang="en-US" dirty="0"/>
-              <a:t>Here is the plan of our lesson today. We shall correction of the homework; then objectives and recall; then real-life situation and action to take; then learning activities; then board summary; then evaluation, remediation and homework.</a:t>
+              <a:t>Here is the plan of our lesson today. First, we shall correct the homework. Then we shall look at the objectives and recall what you already know. After that, we shall study a situation from real life and the action to take, and do the learning activities. Finally, we shall copy the board summary, do the evaluation and the remediation, and I will give you the homework.</a:t>
             </a:r>
             <a:endParaRPr lang="en-US" dirty="0"/>
           </a:p>
@@ -6762,7 +6762,7 @@
                 <a:ea typeface="Times New Roman" pitchFamily="34" charset="-122"/>
                 <a:cs typeface="Times New Roman" pitchFamily="34" charset="-120"/>
               </a:rPr>
-              <a:t>Lesson 19: Meaning of Climate and Köppen's Classification</a:t>
+              <a:t>Lesson 19</a:t>
             </a:r>
             <a:endParaRPr lang="en-US" sz="2600" dirty="0"/>
           </a:p>
